--- a/Verity_Round3_Deck_Complete.pptx
+++ b/Verity_Round3_Deck_Complete.pptx
@@ -2404,7 +2404,7 @@
                 </a:solidFill>
                 <a:latin typeface="Arial"/>
               </a:rPr>
-              <a:t>Round 3: Product Completion (Top 100) | Live: cosmicboom.xyz &amp; verity-brand-governance.vercel.app</a:t>
+              <a:t>Round 3: Product Completion (Top 50 Finalist) | Live: cosmicboom.xyz &amp; verity-brand-governance.vercel.app</a:t>
             </a:r>
             <a:endParaRPr lang="en-US" sz="950" dirty="0"/>
           </a:p>
@@ -4003,7 +4003,7 @@
                 </a:solidFill>
                 <a:latin typeface="Arial"/>
               </a:rPr>
-              <a:t>Team BraKet | CodeAxis Round 3: Product Completion | Top 100 Finalist</a:t>
+              <a:t>Team BraKet | CodeAxis Round 3: Product Completion | Top 50 Finalist</a:t>
             </a:r>
             <a:endParaRPr lang="en-US" sz="1000" dirty="0"/>
           </a:p>
